--- a/docs/BINMAN-how-it-works.pptx
+++ b/docs/BINMAN-how-it-works.pptx
@@ -117,12 +117,12 @@
   <p:extLst>
     <p:ext uri="{521415D9-36F7-43E2-AB2F-B90AF26B5E84}">
       <p14:sectionLst xmlns:p14="http://schemas.microsoft.com/office/powerpoint/2010/main">
-        <p14:section name="Overview" id="{b6566cc2-85ed-d129-59fe-607b78b0ac49}">
+        <p14:section name="Overview" id="{db31bb5e-656e-47fd-0754-611a8ba5da01}">
           <p14:sldIdLst>
             <p14:sldId id="256"/>
           </p14:sldIdLst>
         </p14:section>
-        <p14:section name="How it is built" id="{5d7e5cc2-5c36-087a-8385-815b4b68986d}">
+        <p14:section name="How it is built" id="{315bf5c6-6243-5fa5-ea8f-0a4620407059}">
           <p14:sldIdLst>
             <p14:sldId id="257"/>
             <p14:sldId id="258"/>
@@ -130,7 +130,7 @@
             <p14:sldId id="260"/>
           </p14:sldIdLst>
         </p14:section>
-        <p14:section name="What it answers" id="{e5100555-f81b-1420-d11c-dc9ad0f5c2fb}">
+        <p14:section name="What it answers" id="{3b125dda-5813-a1c7-fb1c-01c2844280c8}">
           <p14:sldIdLst>
             <p14:sldId id="261"/>
             <p14:sldId id="262"/>
@@ -138,12 +138,12 @@
             <p14:sldId id="264"/>
           </p14:sldIdLst>
         </p14:section>
-        <p14:section name="What did not work" id="{03bd60a8-c2e3-a0b1-b777-41ae8790be84}">
+        <p14:section name="What did not work" id="{1593e732-939c-57c3-76e1-d7438e5ef604}">
           <p14:sldIdLst>
             <p14:sldId id="265"/>
           </p14:sldIdLst>
         </p14:section>
-        <p14:section name="Working together" id="{11135443-4f2b-a12a-7538-71cfc0da2224}">
+        <p14:section name="Working together" id="{57361fd7-a805-a521-2049-fb6a87c8e7f7}">
           <p14:sldIdLst>
             <p14:sldId id="266"/>
           </p14:sldIdLst>
@@ -3106,14 +3106,41 @@
       </p:grpSpPr>
       <p:sp>
         <p:nvSpPr>
-          <p:cNvPr id="2" name="Text 0"/>
-          <p:cNvSpPr txBox="1"/>
-          <p:nvPr/>
-        </p:nvSpPr>
-        <p:spPr>
-          <a:xfrm>
-            <a:off x="502920" y="475488"/>
-            <a:ext cx="8229600" cy="621792"/>
+          <p:cNvPr id="2" name="chip-→"/>
+          <p:cNvSpPr/>
+          <p:nvPr/>
+        </p:nvSpPr>
+        <p:spPr>
+          <a:xfrm>
+            <a:off x="502920" y="493776"/>
+            <a:ext cx="475488" cy="475488"/>
+          </a:xfrm>
+          <a:prstGeom prst="roundRect">
+            <a:avLst>
+              <a:gd name="adj" fmla="val 19231"/>
+            </a:avLst>
+          </a:prstGeom>
+          <a:solidFill>
+            <a:srgbClr val="A64708"/>
+          </a:solidFill>
+          <a:ln w="12700">
+            <a:solidFill>
+              <a:srgbClr val="A64708"/>
+            </a:solidFill>
+            <a:prstDash val="solid"/>
+          </a:ln>
+        </p:spPr>
+      </p:sp>
+      <p:sp>
+        <p:nvSpPr>
+          <p:cNvPr id="3" name="Text 1"/>
+          <p:cNvSpPr txBox="1"/>
+          <p:nvPr/>
+        </p:nvSpPr>
+        <p:spPr>
+          <a:xfrm>
+            <a:off x="502920" y="493776"/>
+            <a:ext cx="475488" cy="475488"/>
           </a:xfrm>
           <a:prstGeom prst="rect">
             <a:avLst/>
@@ -3125,13 +3152,49 @@
           <a:bodyPr wrap="square" lIns="0" tIns="0" rIns="0" bIns="0" rtlCol="0" anchor="ctr"/>
           <a:lstStyle/>
           <a:p>
-            <a:pPr indent="0" marL="0">
-              <a:buNone/>
-            </a:pPr>
-            <a:r>
-              <a:rPr lang="en-US" sz="3400" b="1" dirty="0">
+            <a:pPr algn="ctr" indent="0" marL="0">
+              <a:buNone/>
+            </a:pPr>
+            <a:r>
+              <a:rPr lang="en-US" sz="1800" b="1" dirty="0">
                 <a:solidFill>
                   <a:srgbClr val="FFFFFF"/>
+                </a:solidFill>
+              </a:rPr>
+              <a:t>→</a:t>
+            </a:r>
+            <a:endParaRPr lang="en-US" sz="1800" dirty="0"/>
+          </a:p>
+        </p:txBody>
+      </p:sp>
+      <p:sp>
+        <p:nvSpPr>
+          <p:cNvPr id="4" name="Text 2"/>
+          <p:cNvSpPr txBox="1"/>
+          <p:nvPr/>
+        </p:nvSpPr>
+        <p:spPr>
+          <a:xfrm>
+            <a:off x="1161288" y="457200"/>
+            <a:ext cx="10497312" cy="548640"/>
+          </a:xfrm>
+          <a:prstGeom prst="rect">
+            <a:avLst/>
+          </a:prstGeom>
+          <a:noFill/>
+          <a:ln/>
+        </p:spPr>
+        <p:txBody>
+          <a:bodyPr wrap="square" lIns="0" tIns="0" rIns="0" bIns="0" rtlCol="0" anchor="ctr"/>
+          <a:lstStyle/>
+          <a:p>
+            <a:pPr indent="0" marL="0">
+              <a:buNone/>
+            </a:pPr>
+            <a:r>
+              <a:rPr lang="en-US" sz="3200" b="1" dirty="0">
+                <a:solidFill>
+                  <a:schemeClr val="tx1"/>
                 </a:solidFill>
                 <a:latin typeface="Cambria" pitchFamily="34" charset="0"/>
                 <a:ea typeface="Cambria" pitchFamily="34" charset="-122"/>
@@ -3139,20 +3202,20 @@
               </a:rPr>
               <a:t>Where this could go</a:t>
             </a:r>
-            <a:endParaRPr lang="en-US" sz="3400" dirty="0"/>
-          </a:p>
-        </p:txBody>
-      </p:sp>
-      <p:sp>
-        <p:nvSpPr>
-          <p:cNvPr id="3" name="Text 1"/>
-          <p:cNvSpPr txBox="1"/>
-          <p:nvPr/>
-        </p:nvSpPr>
-        <p:spPr>
-          <a:xfrm>
-            <a:off x="502920" y="1097280"/>
-            <a:ext cx="8229600" cy="310896"/>
+            <a:endParaRPr lang="en-US" sz="3200" dirty="0"/>
+          </a:p>
+        </p:txBody>
+      </p:sp>
+      <p:sp>
+        <p:nvSpPr>
+          <p:cNvPr id="5" name="Text 3"/>
+          <p:cNvSpPr txBox="1"/>
+          <p:nvPr/>
+        </p:nvSpPr>
+        <p:spPr>
+          <a:xfrm>
+            <a:off x="502920" y="1133856"/>
+            <a:ext cx="11155680" cy="384048"/>
           </a:xfrm>
           <a:prstGeom prst="rect">
             <a:avLst/>
@@ -3168,39 +3231,39 @@
               <a:buNone/>
             </a:pPr>
             <a:r>
-              <a:rPr lang="en-US" sz="1400" i="1" dirty="0">
+              <a:rPr lang="en-US" sz="1450" i="1" dirty="0">
                 <a:solidFill>
                   <a:srgbClr val="A64708"/>
                 </a:solidFill>
               </a:rPr>
               <a:t>Everything below is already built, measured and public.</a:t>
             </a:r>
-            <a:endParaRPr lang="en-US" sz="1400" dirty="0"/>
-          </a:p>
-        </p:txBody>
-      </p:sp>
-      <p:sp>
-        <p:nvSpPr>
-          <p:cNvPr id="4" name="close-0"/>
+            <a:endParaRPr lang="en-US" sz="1450" dirty="0"/>
+          </a:p>
+        </p:txBody>
+      </p:sp>
+      <p:sp>
+        <p:nvSpPr>
+          <p:cNvPr id="6" name="close-0"/>
           <p:cNvSpPr/>
           <p:nvPr/>
         </p:nvSpPr>
         <p:spPr>
           <a:xfrm>
-            <a:off x="502920" y="1627632"/>
-            <a:ext cx="3520440" cy="1993392"/>
+            <a:off x="502920" y="1682496"/>
+            <a:ext cx="3520440" cy="2267712"/>
           </a:xfrm>
           <a:prstGeom prst="roundRect">
             <a:avLst>
-              <a:gd name="adj" fmla="val 1835"/>
+              <a:gd name="adj" fmla="val 1613"/>
             </a:avLst>
           </a:prstGeom>
           <a:solidFill>
-            <a:srgbClr val="20242A"/>
+            <a:srgbClr val="E9EAE5"/>
           </a:solidFill>
           <a:ln w="12700">
             <a:solidFill>
-              <a:srgbClr val="20242A"/>
+              <a:srgbClr val="E9EAE5"/>
             </a:solidFill>
             <a:prstDash val="solid"/>
           </a:ln>
@@ -3208,14 +3271,14 @@
       </p:sp>
       <p:sp>
         <p:nvSpPr>
-          <p:cNvPr id="5" name="Text 3"/>
-          <p:cNvSpPr txBox="1"/>
-          <p:nvPr/>
-        </p:nvSpPr>
-        <p:spPr>
-          <a:xfrm>
-            <a:off x="740664" y="1792224"/>
-            <a:ext cx="3044952" cy="457200"/>
+          <p:cNvPr id="7" name="Text 5"/>
+          <p:cNvSpPr txBox="1"/>
+          <p:nvPr/>
+        </p:nvSpPr>
+        <p:spPr>
+          <a:xfrm>
+            <a:off x="740664" y="1847088"/>
+            <a:ext cx="3044952" cy="237744"/>
           </a:xfrm>
           <a:prstGeom prst="rect">
             <a:avLst/>
@@ -3244,14 +3307,14 @@
       </p:sp>
       <p:sp>
         <p:nvSpPr>
-          <p:cNvPr id="6" name="Text 4"/>
-          <p:cNvSpPr txBox="1"/>
-          <p:nvPr/>
-        </p:nvSpPr>
-        <p:spPr>
-          <a:xfrm>
-            <a:off x="740664" y="2286000"/>
-            <a:ext cx="3044952" cy="1261872"/>
+          <p:cNvPr id="8" name="Text 6"/>
+          <p:cNvSpPr txBox="1"/>
+          <p:nvPr/>
+        </p:nvSpPr>
+        <p:spPr>
+          <a:xfrm>
+            <a:off x="740664" y="2157984"/>
+            <a:ext cx="3044952" cy="1609344"/>
           </a:xfrm>
           <a:prstGeom prst="rect">
             <a:avLst/>
@@ -3265,61 +3328,61 @@
           <a:p>
             <a:pPr indent="0" marL="0">
               <a:spcAft>
-                <a:spcPts val="700"/>
+                <a:spcPts val="500"/>
               </a:spcAft>
               <a:buNone/>
             </a:pPr>
             <a:r>
-              <a:rPr lang="en-US" sz="1200" dirty="0">
-                <a:solidFill>
-                  <a:srgbClr val="D8DAD4"/>
-                </a:solidFill>
-              </a:rPr>
-              <a:t>The whole atlas is one SQLite file, 195 MB, that opens in any tool you already have.</a:t>
-            </a:r>
-            <a:endParaRPr lang="en-US" sz="1200" dirty="0"/>
+              <a:rPr lang="en-US" sz="1250" dirty="0">
+                <a:solidFill>
+                  <a:schemeClr val="tx1"/>
+                </a:solidFill>
+              </a:rPr>
+              <a:t>The whole atlas is one SQLite file that opens in any tool you already have.</a:t>
+            </a:r>
+            <a:endParaRPr lang="en-US" sz="1250" dirty="0"/>
           </a:p>
           <a:p>
             <a:pPr indent="0" marL="0">
               <a:spcAft>
-                <a:spcPts val="700"/>
+                <a:spcPts val="500"/>
               </a:spcAft>
               <a:buNone/>
             </a:pPr>
             <a:r>
-              <a:rPr lang="en-US" sz="1200" dirty="0">
-                <a:solidFill>
-                  <a:srgbClr val="D8DAD4"/>
-                </a:solidFill>
-              </a:rPr>
-              <a:t>A live interface at binman.mdeller.com, the code on GitHub, the adapter on Hugging Face.</a:t>
-            </a:r>
-            <a:endParaRPr lang="en-US" sz="1200" dirty="0"/>
-          </a:p>
-        </p:txBody>
-      </p:sp>
-      <p:sp>
-        <p:nvSpPr>
-          <p:cNvPr id="7" name="close-1"/>
+              <a:rPr lang="en-US" sz="1250" dirty="0">
+                <a:solidFill>
+                  <a:schemeClr val="tx1"/>
+                </a:solidFill>
+              </a:rPr>
+              <a:t>A live interface at binman.mdeller.com, the code on GitHub, the trained adapter on Hugging Face.</a:t>
+            </a:r>
+            <a:endParaRPr lang="en-US" sz="1250" dirty="0"/>
+          </a:p>
+        </p:txBody>
+      </p:sp>
+      <p:sp>
+        <p:nvSpPr>
+          <p:cNvPr id="9" name="close-1"/>
           <p:cNvSpPr/>
           <p:nvPr/>
         </p:nvSpPr>
         <p:spPr>
           <a:xfrm>
-            <a:off x="4297680" y="1627632"/>
-            <a:ext cx="3520440" cy="1993392"/>
+            <a:off x="4297680" y="1682496"/>
+            <a:ext cx="3520440" cy="2267712"/>
           </a:xfrm>
           <a:prstGeom prst="roundRect">
             <a:avLst>
-              <a:gd name="adj" fmla="val 1835"/>
+              <a:gd name="adj" fmla="val 1613"/>
             </a:avLst>
           </a:prstGeom>
           <a:solidFill>
-            <a:srgbClr val="20242A"/>
+            <a:srgbClr val="E9EAE5"/>
           </a:solidFill>
           <a:ln w="12700">
             <a:solidFill>
-              <a:srgbClr val="20242A"/>
+              <a:srgbClr val="E9EAE5"/>
             </a:solidFill>
             <a:prstDash val="solid"/>
           </a:ln>
@@ -3327,14 +3390,14 @@
       </p:sp>
       <p:sp>
         <p:nvSpPr>
-          <p:cNvPr id="8" name="Text 6"/>
-          <p:cNvSpPr txBox="1"/>
-          <p:nvPr/>
-        </p:nvSpPr>
-        <p:spPr>
-          <a:xfrm>
-            <a:off x="4535424" y="1792224"/>
-            <a:ext cx="3044952" cy="457200"/>
+          <p:cNvPr id="10" name="Text 8"/>
+          <p:cNvSpPr txBox="1"/>
+          <p:nvPr/>
+        </p:nvSpPr>
+        <p:spPr>
+          <a:xfrm>
+            <a:off x="4535424" y="1847088"/>
+            <a:ext cx="3044952" cy="237744"/>
           </a:xfrm>
           <a:prstGeom prst="rect">
             <a:avLst/>
@@ -3363,14 +3426,14 @@
       </p:sp>
       <p:sp>
         <p:nvSpPr>
-          <p:cNvPr id="9" name="Text 7"/>
-          <p:cNvSpPr txBox="1"/>
-          <p:nvPr/>
-        </p:nvSpPr>
-        <p:spPr>
-          <a:xfrm>
-            <a:off x="4535424" y="2286000"/>
-            <a:ext cx="3044952" cy="1261872"/>
+          <p:cNvPr id="11" name="Text 9"/>
+          <p:cNvSpPr txBox="1"/>
+          <p:nvPr/>
+        </p:nvSpPr>
+        <p:spPr>
+          <a:xfrm>
+            <a:off x="4535424" y="2157984"/>
+            <a:ext cx="3044952" cy="1609344"/>
           </a:xfrm>
           <a:prstGeom prst="rect">
             <a:avLst/>
@@ -3384,78 +3447,129 @@
           <a:p>
             <a:pPr indent="0" marL="0">
               <a:spcAft>
-                <a:spcPts val="700"/>
+                <a:spcPts val="500"/>
               </a:spcAft>
               <a:buNone/>
             </a:pPr>
             <a:r>
-              <a:rPr lang="en-US" sz="1200" dirty="0">
-                <a:solidFill>
-                  <a:srgbClr val="D8DAD4"/>
-                </a:solidFill>
-              </a:rPr>
-              <a:t>README — what it is and what it found.</a:t>
-            </a:r>
-            <a:endParaRPr lang="en-US" sz="1200" dirty="0"/>
+              <a:rPr lang="en-US" sz="1250" b="1" dirty="0">
+                <a:solidFill>
+                  <a:schemeClr val="tx1"/>
+                </a:solidFill>
+              </a:rPr>
+              <a:t>README</a:t>
+            </a:r>
+            <a:endParaRPr lang="en-US" sz="1250" dirty="0"/>
           </a:p>
           <a:p>
             <a:pPr indent="0" marL="0">
               <a:spcAft>
-                <a:spcPts val="700"/>
+                <a:spcPts val="500"/>
               </a:spcAft>
               <a:buNone/>
             </a:pPr>
             <a:r>
-              <a:rPr lang="en-US" sz="1200" dirty="0">
-                <a:solidFill>
-                  <a:srgbClr val="D8DAD4"/>
-                </a:solidFill>
-              </a:rPr>
-              <a:t>FINDINGS.md — every number with its method and its n, including the ones that miss.</a:t>
-            </a:r>
-            <a:endParaRPr lang="en-US" sz="1200" dirty="0"/>
+              <a:rPr lang="en-US" sz="1250" dirty="0">
+                <a:solidFill>
+                  <a:schemeClr val="tx1"/>
+                </a:solidFill>
+              </a:rPr>
+              <a:t>what it is and what it found.</a:t>
+            </a:r>
+            <a:endParaRPr lang="en-US" sz="1250" dirty="0"/>
           </a:p>
           <a:p>
             <a:pPr indent="0" marL="0">
               <a:spcAft>
-                <a:spcPts val="700"/>
+                <a:spcPts val="500"/>
               </a:spcAft>
               <a:buNone/>
             </a:pPr>
             <a:r>
-              <a:rPr lang="en-US" sz="1200" dirty="0">
-                <a:solidFill>
-                  <a:srgbClr val="D8DAD4"/>
-                </a:solidFill>
-              </a:rPr>
-              <a:t>DECISIONS.md — 92 entries, each with how to reverse it.</a:t>
-            </a:r>
-            <a:endParaRPr lang="en-US" sz="1200" dirty="0"/>
-          </a:p>
-        </p:txBody>
-      </p:sp>
-      <p:sp>
-        <p:nvSpPr>
-          <p:cNvPr id="10" name="close-2"/>
+              <a:rPr lang="en-US" sz="1250" b="1" dirty="0">
+                <a:solidFill>
+                  <a:schemeClr val="tx1"/>
+                </a:solidFill>
+              </a:rPr>
+              <a:t>FINDINGS.md</a:t>
+            </a:r>
+            <a:endParaRPr lang="en-US" sz="1250" dirty="0"/>
+          </a:p>
+          <a:p>
+            <a:pPr indent="0" marL="0">
+              <a:spcAft>
+                <a:spcPts val="500"/>
+              </a:spcAft>
+              <a:buNone/>
+            </a:pPr>
+            <a:r>
+              <a:rPr lang="en-US" sz="1250" dirty="0">
+                <a:solidFill>
+                  <a:schemeClr val="tx1"/>
+                </a:solidFill>
+              </a:rPr>
+              <a:t>every number with its method and its n, misses included.</a:t>
+            </a:r>
+            <a:endParaRPr lang="en-US" sz="1250" dirty="0"/>
+          </a:p>
+          <a:p>
+            <a:pPr indent="0" marL="0">
+              <a:spcAft>
+                <a:spcPts val="500"/>
+              </a:spcAft>
+              <a:buNone/>
+            </a:pPr>
+            <a:r>
+              <a:rPr lang="en-US" sz="1250" b="1" dirty="0">
+                <a:solidFill>
+                  <a:schemeClr val="tx1"/>
+                </a:solidFill>
+              </a:rPr>
+              <a:t>DECISIONS.md</a:t>
+            </a:r>
+            <a:endParaRPr lang="en-US" sz="1250" dirty="0"/>
+          </a:p>
+          <a:p>
+            <a:pPr indent="0" marL="0">
+              <a:spcAft>
+                <a:spcPts val="500"/>
+              </a:spcAft>
+              <a:buNone/>
+            </a:pPr>
+            <a:r>
+              <a:rPr lang="en-US" sz="1250" dirty="0">
+                <a:solidFill>
+                  <a:schemeClr val="tx1"/>
+                </a:solidFill>
+              </a:rPr>
+              <a:t>92 entries, each with how to reverse it.</a:t>
+            </a:r>
+            <a:endParaRPr lang="en-US" sz="1250" dirty="0"/>
+          </a:p>
+        </p:txBody>
+      </p:sp>
+      <p:sp>
+        <p:nvSpPr>
+          <p:cNvPr id="12" name="close-2"/>
           <p:cNvSpPr/>
           <p:nvPr/>
         </p:nvSpPr>
         <p:spPr>
           <a:xfrm>
-            <a:off x="8092440" y="1627632"/>
-            <a:ext cx="3520440" cy="1993392"/>
+            <a:off x="8092440" y="1682496"/>
+            <a:ext cx="3520440" cy="2267712"/>
           </a:xfrm>
           <a:prstGeom prst="roundRect">
             <a:avLst>
-              <a:gd name="adj" fmla="val 1835"/>
+              <a:gd name="adj" fmla="val 1613"/>
             </a:avLst>
           </a:prstGeom>
           <a:solidFill>
-            <a:srgbClr val="20242A"/>
+            <a:srgbClr val="E9EAE5"/>
           </a:solidFill>
           <a:ln w="12700">
             <a:solidFill>
-              <a:srgbClr val="20242A"/>
+              <a:srgbClr val="E9EAE5"/>
             </a:solidFill>
             <a:prstDash val="solid"/>
           </a:ln>
@@ -3463,14 +3577,14 @@
       </p:sp>
       <p:sp>
         <p:nvSpPr>
-          <p:cNvPr id="11" name="Text 9"/>
-          <p:cNvSpPr txBox="1"/>
-          <p:nvPr/>
-        </p:nvSpPr>
-        <p:spPr>
-          <a:xfrm>
-            <a:off x="8330184" y="1792224"/>
-            <a:ext cx="3044952" cy="457200"/>
+          <p:cNvPr id="13" name="Text 11"/>
+          <p:cNvSpPr txBox="1"/>
+          <p:nvPr/>
+        </p:nvSpPr>
+        <p:spPr>
+          <a:xfrm>
+            <a:off x="8330184" y="1847088"/>
+            <a:ext cx="3044952" cy="237744"/>
           </a:xfrm>
           <a:prstGeom prst="rect">
             <a:avLst/>
@@ -3499,14 +3613,14 @@
       </p:sp>
       <p:sp>
         <p:nvSpPr>
-          <p:cNvPr id="12" name="Text 10"/>
-          <p:cNvSpPr txBox="1"/>
-          <p:nvPr/>
-        </p:nvSpPr>
-        <p:spPr>
-          <a:xfrm>
-            <a:off x="8330184" y="2286000"/>
-            <a:ext cx="3044952" cy="1261872"/>
+          <p:cNvPr id="14" name="Text 12"/>
+          <p:cNvSpPr txBox="1"/>
+          <p:nvPr/>
+        </p:nvSpPr>
+        <p:spPr>
+          <a:xfrm>
+            <a:off x="8330184" y="2157984"/>
+            <a:ext cx="3044952" cy="1609344"/>
           </a:xfrm>
           <a:prstGeom prst="rect">
             <a:avLst/>
@@ -3520,66 +3634,93 @@
           <a:p>
             <a:pPr indent="0" marL="0">
               <a:spcAft>
-                <a:spcPts val="700"/>
+                <a:spcPts val="500"/>
               </a:spcAft>
               <a:buNone/>
             </a:pPr>
             <a:r>
-              <a:rPr lang="en-US" sz="1200" dirty="0">
-                <a:solidFill>
-                  <a:srgbClr val="D8DAD4"/>
+              <a:rPr lang="en-US" sz="1250" dirty="0">
+                <a:solidFill>
+                  <a:schemeClr val="tx1"/>
                 </a:solidFill>
               </a:rPr>
               <a:t>Pick a series from the 82 and put it in front of a crystallographer.</a:t>
             </a:r>
-            <a:endParaRPr lang="en-US" sz="1200" dirty="0"/>
+            <a:endParaRPr lang="en-US" sz="1250" dirty="0"/>
           </a:p>
           <a:p>
             <a:pPr indent="0" marL="0">
               <a:spcAft>
-                <a:spcPts val="700"/>
+                <a:spcPts val="500"/>
               </a:spcAft>
               <a:buNone/>
             </a:pPr>
             <a:r>
-              <a:rPr lang="en-US" sz="1200" dirty="0">
-                <a:solidFill>
-                  <a:srgbClr val="D8DAD4"/>
+              <a:rPr lang="en-US" sz="1250" dirty="0">
+                <a:solidFill>
+                  <a:schemeClr val="tx1"/>
                 </a:solidFill>
               </a:rPr>
               <a:t>Pair ligases to targets, which the ranking deliberately does not do.</a:t>
             </a:r>
-            <a:endParaRPr lang="en-US" sz="1200" dirty="0"/>
+            <a:endParaRPr lang="en-US" sz="1250" dirty="0"/>
           </a:p>
           <a:p>
             <a:pPr indent="0" marL="0">
               <a:spcAft>
-                <a:spcPts val="700"/>
+                <a:spcPts val="500"/>
               </a:spcAft>
               <a:buNone/>
             </a:pPr>
             <a:r>
-              <a:rPr lang="en-US" sz="1200" dirty="0">
-                <a:solidFill>
-                  <a:srgbClr val="D8DAD4"/>
+              <a:rPr lang="en-US" sz="1250" dirty="0">
+                <a:solidFill>
+                  <a:schemeClr val="tx1"/>
                 </a:solidFill>
               </a:rPr>
               <a:t>Superpose glue-free structures to settle induced versus pre-existing properly.</a:t>
             </a:r>
-            <a:endParaRPr lang="en-US" sz="1200" dirty="0"/>
-          </a:p>
-        </p:txBody>
-      </p:sp>
-      <p:sp>
-        <p:nvSpPr>
-          <p:cNvPr id="13" name="Text 11"/>
-          <p:cNvSpPr txBox="1"/>
-          <p:nvPr/>
-        </p:nvSpPr>
-        <p:spPr>
-          <a:xfrm>
-            <a:off x="502920" y="3950208"/>
-            <a:ext cx="10058400" cy="292608"/>
+            <a:endParaRPr lang="en-US" sz="1250" dirty="0"/>
+          </a:p>
+        </p:txBody>
+      </p:sp>
+      <p:sp>
+        <p:nvSpPr>
+          <p:cNvPr id="15" name="card"/>
+          <p:cNvSpPr/>
+          <p:nvPr/>
+        </p:nvSpPr>
+        <p:spPr>
+          <a:xfrm>
+            <a:off x="502920" y="4187952"/>
+            <a:ext cx="11155680" cy="1298448"/>
+          </a:xfrm>
+          <a:prstGeom prst="roundRect">
+            <a:avLst>
+              <a:gd name="adj" fmla="val 2817"/>
+            </a:avLst>
+          </a:prstGeom>
+          <a:solidFill>
+            <a:srgbClr val="E9EAE5"/>
+          </a:solidFill>
+          <a:ln w="12700">
+            <a:solidFill>
+              <a:srgbClr val="E9EAE5"/>
+            </a:solidFill>
+            <a:prstDash val="solid"/>
+          </a:ln>
+        </p:spPr>
+      </p:sp>
+      <p:sp>
+        <p:nvSpPr>
+          <p:cNvPr id="16" name="Text 14"/>
+          <p:cNvSpPr txBox="1"/>
+          <p:nvPr/>
+        </p:nvSpPr>
+        <p:spPr>
+          <a:xfrm>
+            <a:off x="740664" y="4352544"/>
+            <a:ext cx="10680192" cy="237744"/>
           </a:xfrm>
           <a:prstGeom prst="rect">
             <a:avLst/>
@@ -3600,7 +3741,7 @@
                   <a:srgbClr val="A64708"/>
                 </a:solidFill>
               </a:rPr>
-              <a:t>The two rules the whole project is built on</a:t>
+              <a:t>THE TWO RULES THE WHOLE PROJECT IS BUILT ON</a:t>
             </a:r>
             <a:endParaRPr lang="en-US" sz="1100" dirty="0"/>
           </a:p>
@@ -3608,14 +3749,70 @@
       </p:sp>
       <p:sp>
         <p:nvSpPr>
-          <p:cNvPr id="14" name="Text 12"/>
-          <p:cNvSpPr txBox="1"/>
-          <p:nvPr/>
-        </p:nvSpPr>
-        <p:spPr>
-          <a:xfrm>
-            <a:off x="502920" y="4297680"/>
-            <a:ext cx="11155680" cy="1078992"/>
+          <p:cNvPr id="17" name="Text 15"/>
+          <p:cNvSpPr txBox="1"/>
+          <p:nvPr/>
+        </p:nvSpPr>
+        <p:spPr>
+          <a:xfrm>
+            <a:off x="740664" y="4663440"/>
+            <a:ext cx="10680192" cy="640080"/>
+          </a:xfrm>
+          <a:prstGeom prst="rect">
+            <a:avLst/>
+          </a:prstGeom>
+          <a:noFill/>
+          <a:ln/>
+        </p:spPr>
+        <p:txBody>
+          <a:bodyPr wrap="square" lIns="0" tIns="0" rIns="0" bIns="0" rtlCol="0" anchor="t"/>
+          <a:lstStyle/>
+          <a:p>
+            <a:pPr indent="0" marL="0">
+              <a:spcAft>
+                <a:spcPts val="500"/>
+              </a:spcAft>
+              <a:buNone/>
+            </a:pPr>
+            <a:r>
+              <a:rPr lang="en-US" sz="1250" dirty="0">
+                <a:solidFill>
+                  <a:schemeClr val="tx1"/>
+                </a:solidFill>
+              </a:rPr>
+              <a:t>1 · Every module is validated against independently curated published datasets, never against controls written for this project.</a:t>
+            </a:r>
+            <a:endParaRPr lang="en-US" sz="1250" dirty="0"/>
+          </a:p>
+          <a:p>
+            <a:pPr indent="0" marL="0">
+              <a:spcAft>
+                <a:spcPts val="500"/>
+              </a:spcAft>
+              <a:buNone/>
+            </a:pPr>
+            <a:r>
+              <a:rPr lang="en-US" sz="1250" dirty="0">
+                <a:solidFill>
+                  <a:schemeClr val="tx1"/>
+                </a:solidFill>
+              </a:rPr>
+              <a:t>2 · The language model never computes, estimates or reports a number. Every figure you have seen was computed deterministically in Python.</a:t>
+            </a:r>
+            <a:endParaRPr lang="en-US" sz="1250" dirty="0"/>
+          </a:p>
+        </p:txBody>
+      </p:sp>
+      <p:sp>
+        <p:nvSpPr>
+          <p:cNvPr id="18" name="Text 16"/>
+          <p:cNvSpPr txBox="1"/>
+          <p:nvPr/>
+        </p:nvSpPr>
+        <p:spPr>
+          <a:xfrm>
+            <a:off x="502920" y="5669280"/>
+            <a:ext cx="10972800" cy="310896"/>
           </a:xfrm>
           <a:prstGeom prst="rect">
             <a:avLst/>
@@ -3628,110 +3825,62 @@
           <a:lstStyle/>
           <a:p>
             <a:pPr indent="0" marL="0">
-              <a:lnSpc>
-                <a:spcPct val="120000"/>
-              </a:lnSpc>
-              <a:buNone/>
-            </a:pPr>
-            <a:r>
-              <a:rPr lang="en-US" sz="1300" b="1" dirty="0">
-                <a:solidFill>
-                  <a:srgbClr val="E9EAE5"/>
-                </a:solidFill>
-              </a:rPr>
-              <a:t>1 · </a:t>
-            </a:r>
-            <a:pPr indent="0" marL="0">
-              <a:lnSpc>
-                <a:spcPct val="120000"/>
-              </a:lnSpc>
-              <a:buNone/>
-            </a:pPr>
-            <a:r>
-              <a:rPr lang="en-US" sz="1300" dirty="0">
-                <a:solidFill>
-                  <a:srgbClr val="E9EAE5"/>
-                </a:solidFill>
-              </a:rPr>
-              <a:t>Every module is validated against independently curated published datasets, never against controls written for this project.</a:t>
-            </a:r>
-            <a:endParaRPr lang="en-US" sz="1300" dirty="0"/>
-          </a:p>
-          <a:p>
-            <a:pPr algn="r" indent="0" marL="0">
-              <a:lnSpc>
-                <a:spcPct val="118000"/>
-              </a:lnSpc>
-              <a:buNone/>
-            </a:pPr>
-            <a:endParaRPr lang="en-US" sz="1300" dirty="0"/>
-          </a:p>
-          <a:p>
-            <a:pPr indent="0" marL="0">
-              <a:lnSpc>
-                <a:spcPct val="120000"/>
-              </a:lnSpc>
-              <a:buNone/>
-            </a:pPr>
-            <a:r>
-              <a:rPr lang="en-US" sz="1300" b="1" dirty="0">
-                <a:solidFill>
-                  <a:srgbClr val="E9EAE5"/>
-                </a:solidFill>
-              </a:rPr>
-              <a:t>2 · </a:t>
-            </a:r>
-            <a:pPr indent="0" marL="0">
-              <a:lnSpc>
-                <a:spcPct val="120000"/>
-              </a:lnSpc>
-              <a:buNone/>
-            </a:pPr>
-            <a:r>
-              <a:rPr lang="en-US" sz="1300" dirty="0">
-                <a:solidFill>
-                  <a:srgbClr val="E9EAE5"/>
-                </a:solidFill>
-              </a:rPr>
-              <a:t>The language model never computes, estimates or reports a number. Every figure you have seen was computed deterministically in Python.</a:t>
-            </a:r>
-            <a:endParaRPr lang="en-US" sz="1300" dirty="0"/>
-          </a:p>
-        </p:txBody>
-      </p:sp>
-      <p:sp>
-        <p:nvSpPr>
-          <p:cNvPr id="15" name="Text 13"/>
-          <p:cNvSpPr txBox="1"/>
-          <p:nvPr/>
-        </p:nvSpPr>
-        <p:spPr>
-          <a:xfrm>
-            <a:off x="502920" y="5852160"/>
-            <a:ext cx="10972800" cy="310896"/>
-          </a:xfrm>
-          <a:prstGeom prst="rect">
-            <a:avLst/>
-          </a:prstGeom>
-          <a:noFill/>
-          <a:ln/>
-        </p:spPr>
-        <p:txBody>
-          <a:bodyPr wrap="square" lIns="0" tIns="0" rIns="0" bIns="0" rtlCol="0" anchor="ctr"/>
-          <a:lstStyle/>
-          <a:p>
-            <a:pPr indent="0" marL="0">
               <a:buNone/>
             </a:pPr>
             <a:r>
               <a:rPr lang="en-US" sz="1150" dirty="0">
                 <a:solidFill>
-                  <a:srgbClr val="9AA096"/>
+                  <a:srgbClr val="61655F"/>
                 </a:solidFill>
               </a:rPr>
               <a:t>Marc C. Deller, D.Phil.  ·  marc@marcdeller.com  ·  binman.mdeller.com  ·  github.com/bellcheddar/BINMAN</a:t>
             </a:r>
             <a:endParaRPr lang="en-US" sz="1150" dirty="0"/>
+          </a:p>
+        </p:txBody>
+      </p:sp>
+      <p:sp>
+        <p:nvSpPr>
+          <p:cNvPr id="25" name="Slide Number Placeholder 0"/>
+          <p:cNvSpPr>
+            <a:spLocks noGrp="1"/>
+          </p:cNvSpPr>
+          <p:nvPr>
+            <p:ph type="sldNum" sz="quarter" idx="4294967295"/>
+          </p:nvPr>
+        </p:nvSpPr>
+        <p:spPr>
+          <a:xfrm>
+            <a:off x="11384280" y="6437376"/>
+            <a:ext cx="274320" cy="274320"/>
+          </a:xfrm>
+          <a:prstGeom prst="rect">
+            <a:avLst/>
+          </a:prstGeom>
+          <a:extLst>
+            <a:ext uri="{C572A759-6A51-4108-AA02-DFA0A04FC94B}">
+              <ma14:wrappingTextBoxFlag xmlns:ma14="http://schemas.microsoft.com/office/mac/drawingml/2011/main" val="0"/>
+            </a:ext>
+          </a:extLst>
+        </p:spPr>
+        <p:txBody>
+          <a:bodyPr/>
+          <a:lstStyle>
+            <a:lvl1pPr>
+              <a:defRPr sz="950">
+                <a:solidFill>
+                  <a:srgbClr val="61655F"/>
+                </a:solidFill>
+              </a:defRPr>
+            </a:lvl1pPr>
+          </a:lstStyle>
+          <a:p>
+            <a:pPr algn="r"/>
+            <a:fld id="{F7021451-1387-4CA6-816F-3879F97B5CBC}" type="slidenum">
+              <a:rPr b="0" lang="en-US"/>
+              <a:t>11</a:t>
+            </a:fld>
+            <a:endParaRPr lang="en-US"/>
           </a:p>
         </p:txBody>
       </p:sp>
